--- a/presentation/PINN_EOS_Al.pptx
+++ b/presentation/PINN_EOS_Al.pptx
@@ -521,7 +521,7 @@
           <a:lstStyle/>
           <a:p>
             <a:r>
-              <a:t>Наша задача — заменить табличное уравнение состояния алюминия быстрым и физически корректным суррогатом. Диапазон: плотность 10⁻³…10⁴ г/см³, температура 0.1…10⁷ К, давление меняется на 12 порядков. Главная мысль выступления: обычная сеть точнее, но ломает физику, а PINN сохраняет корректные производные при потере 3 процентных пунктов точности. Файл модели — 0.1 МБ при лимите 10 МБ.</a:t>
+              <a:t>Наша задача — заменить табличное уравнение состояния алюминия быстрым и физически корректным суррогатом. Диапазон: плотность 10⁻³…10⁴ г/см³, температура 0.1…10⁷ К, давление меняется на 12 порядков. Главная мысль выступления: точность у обычной сети и у PINN практически одинаковая, но обычная сеть ломает физику в каждой третьей точке, а PINN сохраняет корректные производные. Файл модели — 0.1 МБ при лимите 10 МБ.</a:t>
             </a:r>
           </a:p>
         </p:txBody>
@@ -871,7 +871,7 @@
           <a:lstStyle/>
           <a:p>
             <a:r>
-              <a:t>Главная таблица. Читать так: точность Vanilla чуть выше (5.7 % против 8.9 % по медиане), но нарушений 32 % против 0.43 % — разница в 74 раза. Размер одинаковый, 0.1 МБ, скорость около микросекунды.</a:t>
+              <a:t>Главная таблица. Читать так: точность Vanilla чуть выше (5.7 % против 8.9 % по медиане), но нарушений 36 % против 0.43 % — разница в 84 раза. Размер одинаковый, 0.1 МБ, скорость около микросекунды.</a:t>
             </a:r>
           </a:p>
         </p:txBody>
@@ -1571,7 +1571,7 @@
           <a:lstStyle/>
           <a:p>
             <a:r>
-              <a:t>Давление и энергия покрывают 12 порядков, энергия меняет знак. Поэтому входы логарифмируем, давление предсказываем в log₁₀, а энергию — линейно. Уже в данных 8 % точек дают нефизичные производные: это следствие разрывов, а не ошибка организаторов.</a:t>
+              <a:t>Давление и энергия покрывают 12 порядков, энергия меняет знак. Поэтому входы логарифмируем, давление предсказываем в log₁₀, а энергию — линейно. Уже в данных 9.5 % узлов дают нефизичные производные: это следствие разрывов, а не ошибка организаторов.</a:t>
             </a:r>
           </a:p>
         </p:txBody>
@@ -1851,7 +1851,7 @@
           <a:lstStyle/>
           <a:p>
             <a:r>
-              <a:t>Vanilla MLP: 25 282 параметра, обучение за пару минут на CPU, R² = 0.999. Но 32 % точек нефизичны: в 28 % отрицательная теплоёмкость, в 8.6 % мнимая скорость звука. Это и есть шум градиентов, о котором предупреждали организаторы.</a:t>
+              <a:t>Vanilla MLP: 25 282 параметра, обучение за пару минут на CPU, R² = 0.999. Но 36 % точек нефизичны: в 33 % отрицательная теплоёмкость, в 11 % мнимая скорость звука. Это и есть шум градиентов, о котором предупреждали организаторы.</a:t>
             </a:r>
           </a:p>
         </p:txBody>
@@ -11591,7 +11591,7 @@
                           </a:solidFill>
                           <a:latin typeface="Arial"/>
                         </a:rPr>
-                        <a:t>0.99915</a:t>
+                        <a:t>0.99874</a:t>
                       </a:r>
                     </a:p>
                   </a:txBody>
@@ -11614,7 +11614,7 @@
                           </a:solidFill>
                           <a:latin typeface="Arial"/>
                         </a:rPr>
-                        <a:t>5.69 %</a:t>
+                        <a:t>9.17 %</a:t>
                       </a:r>
                     </a:p>
                   </a:txBody>
@@ -11637,7 +11637,7 @@
                           </a:solidFill>
                           <a:latin typeface="Arial"/>
                         </a:rPr>
-                        <a:t>25.3 %</a:t>
+                        <a:t>28.7 %</a:t>
                       </a:r>
                     </a:p>
                   </a:txBody>
@@ -11660,7 +11660,7 @@
                           </a:solidFill>
                           <a:latin typeface="Arial"/>
                         </a:rPr>
-                        <a:t>0.99979</a:t>
+                        <a:t>0.99926</a:t>
                       </a:r>
                     </a:p>
                   </a:txBody>
@@ -11683,7 +11683,7 @@
                           </a:solidFill>
                           <a:latin typeface="Arial"/>
                         </a:rPr>
-                        <a:t>31.87 %</a:t>
+                        <a:t>36.17 %</a:t>
                       </a:r>
                     </a:p>
                   </a:txBody>
@@ -11729,7 +11729,7 @@
                           </a:solidFill>
                           <a:latin typeface="Arial"/>
                         </a:rPr>
-                        <a:t>0.91 мкс</a:t>
+                        <a:t>0.98 мкс</a:t>
                       </a:r>
                     </a:p>
                   </a:txBody>
@@ -11915,7 +11915,7 @@
                           </a:solidFill>
                           <a:latin typeface="Arial"/>
                         </a:rPr>
-                        <a:t>0.95 мкс</a:t>
+                        <a:t>0.96 мкс</a:t>
                       </a:r>
                     </a:p>
                   </a:txBody>
@@ -12095,7 +12095,7 @@
                 </a:solidFill>
                 <a:latin typeface="Arial"/>
               </a:rPr>
-              <a:t>PINN в 74 раз реже нарушает физику</a:t>
+              <a:t>PINN в 84 раз реже нарушает физику</a:t>
             </a:r>
           </a:p>
         </p:txBody>
@@ -12137,7 +12137,7 @@
                 </a:solidFill>
                 <a:latin typeface="Arial"/>
               </a:rPr>
-              <a:t>32 % → 0.43 % при потере 3.2 п.п. медианной точности P</a:t>
+              <a:t>36 % → 0.43 % при потере 0.2 п.п. медианной точности P</a:t>
             </a:r>
           </a:p>
         </p:txBody>
@@ -14203,7 +14203,7 @@
                 </a:solidFill>
                 <a:latin typeface="Arial"/>
               </a:rPr>
-              <a:t> — 11.7 % от табличной c_s</a:t>
+              <a:t> — 13.0 % от табличной c_s</a:t>
             </a:r>
           </a:p>
           <a:p>
@@ -14259,7 +14259,7 @@
                 </a:solidFill>
                 <a:latin typeface="Arial"/>
               </a:rPr>
-              <a:t>У Vanilla MLP медиана ниже (8.4 %), но c_s² &lt; 0 в 8.6 % точек</a:t>
+              <a:t>У Vanilla MLP медиана ниже (0.0 %), но c_s² &lt; 0 в 11.0 % точек</a:t>
             </a:r>
             <a:r>
               <a:rPr sz="980">
@@ -14396,7 +14396,7 @@
                 </a:solidFill>
                 <a:latin typeface="Arial"/>
               </a:rPr>
-              <a:t>R² = 0.90</a:t>
+              <a:t>R² = 0.94</a:t>
             </a:r>
           </a:p>
         </p:txBody>
@@ -14566,7 +14566,7 @@
                 </a:solidFill>
                 <a:latin typeface="Arial"/>
               </a:rPr>
-              <a:t>83 %</a:t>
+              <a:t>65 %</a:t>
             </a:r>
           </a:p>
         </p:txBody>
@@ -17233,7 +17233,7 @@
                           </a:solidFill>
                           <a:latin typeface="Arial"/>
                         </a:rPr>
-                        <a:t>0.100 МБ</a:t>
+                        <a:t>0.000 МБ</a:t>
                       </a:r>
                     </a:p>
                   </a:txBody>
@@ -17256,7 +17256,7 @@
                           </a:solidFill>
                           <a:latin typeface="Arial"/>
                         </a:rPr>
-                        <a:t>1.00 мкс</a:t>
+                        <a:t>0.00 мкс</a:t>
                       </a:r>
                     </a:p>
                   </a:txBody>
@@ -17279,7 +17279,7 @@
                           </a:solidFill>
                           <a:latin typeface="Arial"/>
                         </a:rPr>
-                        <a:t>1.00 млн</a:t>
+                        <a:t>0.00 млн</a:t>
                       </a:r>
                     </a:p>
                   </a:txBody>
@@ -17350,7 +17350,7 @@
                           </a:solidFill>
                           <a:latin typeface="Arial"/>
                         </a:rPr>
-                        <a:t>0.107 МБ</a:t>
+                        <a:t>0.000 МБ</a:t>
                       </a:r>
                     </a:p>
                   </a:txBody>
@@ -17373,7 +17373,7 @@
                           </a:solidFill>
                           <a:latin typeface="Arial"/>
                         </a:rPr>
-                        <a:t>1.05 мкс</a:t>
+                        <a:t>0.00 мкс</a:t>
                       </a:r>
                     </a:p>
                   </a:txBody>
@@ -17396,7 +17396,7 @@
                           </a:solidFill>
                           <a:latin typeface="Arial"/>
                         </a:rPr>
-                        <a:t>0.95 млн</a:t>
+                        <a:t>0.00 млн</a:t>
                       </a:r>
                     </a:p>
                   </a:txBody>
@@ -17467,7 +17467,7 @@
                           </a:solidFill>
                           <a:latin typeface="Arial"/>
                         </a:rPr>
-                        <a:t>0.031 МБ</a:t>
+                        <a:t>0.000 МБ</a:t>
                       </a:r>
                     </a:p>
                   </a:txBody>
@@ -17490,7 +17490,7 @@
                           </a:solidFill>
                           <a:latin typeface="Arial"/>
                         </a:rPr>
-                        <a:t>1.10 мкс</a:t>
+                        <a:t>0.00 мкс</a:t>
                       </a:r>
                     </a:p>
                   </a:txBody>
@@ -17513,7 +17513,7 @@
                           </a:solidFill>
                           <a:latin typeface="Arial"/>
                         </a:rPr>
-                        <a:t>0.91 млн</a:t>
+                        <a:t>0.00 млн</a:t>
                       </a:r>
                     </a:p>
                   </a:txBody>
@@ -17536,7 +17536,7 @@
                           </a:solidFill>
                           <a:latin typeface="Arial"/>
                         </a:rPr>
-                        <a:t>0.011</a:t>
+                        <a:t>0.000</a:t>
                       </a:r>
                     </a:p>
                   </a:txBody>
@@ -19924,7 +19924,7 @@
                 </a:solidFill>
                 <a:latin typeface="Arial"/>
               </a:rPr>
-              <a:t>Vanilla MLP: R²(P) = 0.9991</a:t>
+              <a:t>Vanilla MLP: R²(P) = 0.9987</a:t>
             </a:r>
           </a:p>
           <a:p>
@@ -19952,7 +19952,7 @@
                 </a:solidFill>
                 <a:latin typeface="Arial"/>
               </a:rPr>
-              <a:t>PINN: 0.43 % нарушений вместо 32 %</a:t>
+              <a:t>PINN: 0.43 % нарушений вместо 36 %</a:t>
             </a:r>
           </a:p>
           <a:p>
@@ -23680,7 +23680,7 @@
                 </a:solidFill>
                 <a:latin typeface="Arial"/>
               </a:rPr>
-              <a:t>P растёт монотонно, но внутри одного региона различается на 4 порядка; 8.0 % точек таблицы дают нефизичные производные</a:t>
+              <a:t>P растёт монотонно, но внутри одного региона различается на 4 порядка; 9.5 % точек таблицы дают нефизичные производные</a:t>
             </a:r>
           </a:p>
           <a:p>
@@ -26523,7 +26523,7 @@
                 </a:solidFill>
                 <a:latin typeface="Arial"/>
               </a:rPr>
-              <a:t>0.56 мкс</a:t>
+              <a:t>0.54 мкс</a:t>
             </a:r>
           </a:p>
         </p:txBody>
@@ -27291,7 +27291,7 @@
                 </a:solidFill>
                 <a:latin typeface="Arial"/>
               </a:rPr>
-              <a:t>8.0 % узлов таблицы формально нарушают хотя бы одно условие</a:t>
+              <a:t>9.5 % узлов таблицы формально нарушают хотя бы одно условие</a:t>
             </a:r>
           </a:p>
           <a:p>
@@ -28025,7 +28025,7 @@
                 </a:solidFill>
                 <a:latin typeface="Arial"/>
               </a:rPr>
-              <a:t>R² по P = 0.99915, R² по e = 0.99979</a:t>
+              <a:t>R² по P = 0.99874, R² по e = 0.99926</a:t>
             </a:r>
           </a:p>
           <a:p>
@@ -28053,7 +28053,7 @@
                 </a:solidFill>
                 <a:latin typeface="Arial"/>
               </a:rPr>
-              <a:t>медианная ошибка P = 5.69 %, p95 = 25.3 %</a:t>
+              <a:t>медианная ошибка P = 9.17 %, p95 = 28.7 %</a:t>
             </a:r>
           </a:p>
           <a:p>
@@ -28246,7 +28246,7 @@
                 </a:solidFill>
                 <a:latin typeface="Arial"/>
               </a:rPr>
-              <a:t>31.9 %</a:t>
+              <a:t>36.2 %</a:t>
             </a:r>
           </a:p>
         </p:txBody>
@@ -28416,7 +28416,7 @@
                 </a:solidFill>
                 <a:latin typeface="Arial"/>
               </a:rPr>
-              <a:t>28.0 %</a:t>
+              <a:t>33.3 %</a:t>
             </a:r>
           </a:p>
         </p:txBody>
@@ -28586,7 +28586,7 @@
                 </a:solidFill>
                 <a:latin typeface="Arial"/>
               </a:rPr>
-              <a:t>6.1 %</a:t>
+              <a:t>5.3 %</a:t>
             </a:r>
           </a:p>
         </p:txBody>
